--- a/curso_es/pptx/S19.pptx
+++ b/curso_es/pptx/S19.pptx
@@ -4028,7 +4028,7 @@
                 </a:solidFill>
                 <a:latin typeface="Fredoka"/>
               </a:rPr>
-              <a:t>Caso 2 · Un curso entero</a:t>
+              <a:t>Caso 2 · Un equipo entero</a:t>
             </a:r>
           </a:p>
         </p:txBody>
@@ -4110,7 +4110,7 @@
                 </a:solidFill>
                 <a:latin typeface="Nunito Sans"/>
               </a:rPr>
-              <a:t>Chen: «Un chico de 1.º me empujó ayer en el pasillo. Los de 1.º son todos unos maleducados».</a:t>
+              <a:t>Una chica: «Un chico de otro equipo me empujó en el partido. Los de ese equipo son todos unos brutos».</a:t>
             </a:r>
           </a:p>
         </p:txBody>
@@ -4183,7 +4183,7 @@
                 </a:solidFill>
                 <a:latin typeface="Nunito Sans"/>
               </a:rPr>
-              <a:t>¿Cuántos alumnos hay en 1.º? Muchos: uno no los representa.</a:t>
+              <a:t>¿Cuántos jugadores hay en ese equipo? Muchos: uno no los representa.</a:t>
             </a:r>
           </a:p>
           <a:p>
@@ -4728,7 +4728,7 @@
                 </a:solidFill>
                 <a:latin typeface="Nunito Sans"/>
               </a:rPr>
-              <a:t>Maialen prueba una cucharada de la sopa y dice: «Esta sopa está salada». Solo ha mirado un caso.</a:t>
+              <a:t>Una chica prueba una cucharada de la sopa y dice: «Esta sopa está salada». Solo ha mirado un caso.</a:t>
             </a:r>
           </a:p>
         </p:txBody>
